--- a/proposals/機種分析/レヴュースタァライト/revuestarlight_guide_v1.pptx
+++ b/proposals/機種分析/レヴュースタァライト/revuestarlight_guide_v1.pptx
@@ -3504,7 +3504,7 @@
         <p:spPr>
           <a:xfrm>
             <a:off x="5166360" y="256032"/>
-            <a:ext cx="3749039" cy="1430000"/>
+            <a:ext cx="3749039" cy="1234000"/>
           </a:xfrm>
           <a:prstGeom prst="rect">
             <a:avLst/>
@@ -3549,7 +3549,7 @@
         <p:spPr>
           <a:xfrm>
             <a:off x="5166360" y="256032"/>
-            <a:ext cx="60000" cy="1430000"/>
+            <a:ext cx="60000" cy="1234000"/>
           </a:xfrm>
           <a:prstGeom prst="rect">
             <a:avLst/>
@@ -3591,8 +3591,8 @@
         </p:nvSpPr>
         <p:spPr>
           <a:xfrm>
-            <a:off x="5349240" y="316032"/>
-            <a:ext cx="3474720" cy="300000"/>
+            <a:off x="5349240" y="306032"/>
+            <a:ext cx="3474720" cy="270000"/>
           </a:xfrm>
           <a:prstGeom prst="rect">
             <a:avLst/>
@@ -3626,8 +3626,8 @@
         </p:nvSpPr>
         <p:spPr>
           <a:xfrm>
-            <a:off x="5349240" y="616032"/>
-            <a:ext cx="3474720" cy="900000"/>
+            <a:off x="5349240" y="576032"/>
+            <a:ext cx="3474720" cy="850000"/>
           </a:xfrm>
           <a:prstGeom prst="rect">
             <a:avLst/>
@@ -3662,8 +3662,8 @@
         </p:nvSpPr>
         <p:spPr>
           <a:xfrm>
-            <a:off x="5166360" y="1786032"/>
-            <a:ext cx="3749039" cy="1430000"/>
+            <a:off x="5166360" y="1554032"/>
+            <a:ext cx="3749039" cy="1234000"/>
           </a:xfrm>
           <a:prstGeom prst="rect">
             <a:avLst/>
@@ -3707,8 +3707,8 @@
         </p:nvSpPr>
         <p:spPr>
           <a:xfrm>
-            <a:off x="5166360" y="1786032"/>
-            <a:ext cx="60000" cy="1430000"/>
+            <a:off x="5166360" y="1554032"/>
+            <a:ext cx="60000" cy="1234000"/>
           </a:xfrm>
           <a:prstGeom prst="rect">
             <a:avLst/>
@@ -3750,8 +3750,8 @@
         </p:nvSpPr>
         <p:spPr>
           <a:xfrm>
-            <a:off x="5349240" y="1846032"/>
-            <a:ext cx="3474720" cy="300000"/>
+            <a:off x="5349240" y="1604032"/>
+            <a:ext cx="3474720" cy="270000"/>
           </a:xfrm>
           <a:prstGeom prst="rect">
             <a:avLst/>
@@ -3785,8 +3785,8 @@
         </p:nvSpPr>
         <p:spPr>
           <a:xfrm>
-            <a:off x="5349240" y="2146032"/>
-            <a:ext cx="3474720" cy="900000"/>
+            <a:off x="5349240" y="1874032"/>
+            <a:ext cx="3474720" cy="850000"/>
           </a:xfrm>
           <a:prstGeom prst="rect">
             <a:avLst/>
@@ -3821,8 +3821,8 @@
         </p:nvSpPr>
         <p:spPr>
           <a:xfrm>
-            <a:off x="5166360" y="3316032"/>
-            <a:ext cx="3749039" cy="1430000"/>
+            <a:off x="5166360" y="2852032"/>
+            <a:ext cx="3749039" cy="1234000"/>
           </a:xfrm>
           <a:prstGeom prst="rect">
             <a:avLst/>
@@ -3866,8 +3866,8 @@
         </p:nvSpPr>
         <p:spPr>
           <a:xfrm>
-            <a:off x="5166360" y="3316032"/>
-            <a:ext cx="60000" cy="1430000"/>
+            <a:off x="5166360" y="2852032"/>
+            <a:ext cx="60000" cy="1234000"/>
           </a:xfrm>
           <a:prstGeom prst="rect">
             <a:avLst/>
@@ -3909,8 +3909,8 @@
         </p:nvSpPr>
         <p:spPr>
           <a:xfrm>
-            <a:off x="5349240" y="3376032"/>
-            <a:ext cx="3474720" cy="300000"/>
+            <a:off x="5349240" y="2902032"/>
+            <a:ext cx="3474720" cy="270000"/>
           </a:xfrm>
           <a:prstGeom prst="rect">
             <a:avLst/>
@@ -3944,8 +3944,8 @@
         </p:nvSpPr>
         <p:spPr>
           <a:xfrm>
-            <a:off x="5349240" y="3676032"/>
-            <a:ext cx="3474720" cy="900000"/>
+            <a:off x="5349240" y="3172032"/>
+            <a:ext cx="3474720" cy="850000"/>
           </a:xfrm>
           <a:prstGeom prst="rect">
             <a:avLst/>
